--- a/repo/proto_clubln.pptx
+++ b/repo/proto_clubln.pptx
@@ -11,6 +11,15 @@
     <p:sldId id="260" r:id="rId5"/>
     <p:sldId id="261" r:id="rId6"/>
     <p:sldId id="257" r:id="rId7"/>
+    <p:sldId id="262" r:id="rId8"/>
+    <p:sldId id="263" r:id="rId9"/>
+    <p:sldId id="264" r:id="rId10"/>
+    <p:sldId id="265" r:id="rId11"/>
+    <p:sldId id="266" r:id="rId12"/>
+    <p:sldId id="267" r:id="rId13"/>
+    <p:sldId id="268" r:id="rId14"/>
+    <p:sldId id="269" r:id="rId15"/>
+    <p:sldId id="270" r:id="rId16"/>
   </p:sldIdLst>
   <p:sldSz cx="12192000" cy="6858000"/>
   <p:notesSz cx="6858000" cy="9144000"/>
@@ -109,6 +118,11 @@
       </a:defRPr>
     </a:lvl9pPr>
   </p:defaultTextStyle>
+  <p:extLst>
+    <p:ext uri="{EFAFB233-063F-42B5-8137-9DF3F51BA10A}">
+      <p15:sldGuideLst xmlns:p15="http://schemas.microsoft.com/office/powerpoint/2012/main"/>
+    </p:ext>
+  </p:extLst>
 </p:presentation>
 </file>
 
@@ -261,7 +275,7 @@
           <a:p>
             <a:fld id="{86BC45ED-4D28-43F2-B307-A81661FA2ADE}" type="datetimeFigureOut">
               <a:rPr lang="es-MX" smtClean="0"/>
-              <a:t>16/12/2025</a:t>
+              <a:t>29/12/2025</a:t>
             </a:fld>
             <a:endParaRPr lang="es-MX"/>
           </a:p>
@@ -461,7 +475,7 @@
           <a:p>
             <a:fld id="{86BC45ED-4D28-43F2-B307-A81661FA2ADE}" type="datetimeFigureOut">
               <a:rPr lang="es-MX" smtClean="0"/>
-              <a:t>16/12/2025</a:t>
+              <a:t>29/12/2025</a:t>
             </a:fld>
             <a:endParaRPr lang="es-MX"/>
           </a:p>
@@ -671,7 +685,7 @@
           <a:p>
             <a:fld id="{86BC45ED-4D28-43F2-B307-A81661FA2ADE}" type="datetimeFigureOut">
               <a:rPr lang="es-MX" smtClean="0"/>
-              <a:t>16/12/2025</a:t>
+              <a:t>29/12/2025</a:t>
             </a:fld>
             <a:endParaRPr lang="es-MX"/>
           </a:p>
@@ -871,7 +885,7 @@
           <a:p>
             <a:fld id="{86BC45ED-4D28-43F2-B307-A81661FA2ADE}" type="datetimeFigureOut">
               <a:rPr lang="es-MX" smtClean="0"/>
-              <a:t>16/12/2025</a:t>
+              <a:t>29/12/2025</a:t>
             </a:fld>
             <a:endParaRPr lang="es-MX"/>
           </a:p>
@@ -1147,7 +1161,7 @@
           <a:p>
             <a:fld id="{86BC45ED-4D28-43F2-B307-A81661FA2ADE}" type="datetimeFigureOut">
               <a:rPr lang="es-MX" smtClean="0"/>
-              <a:t>16/12/2025</a:t>
+              <a:t>29/12/2025</a:t>
             </a:fld>
             <a:endParaRPr lang="es-MX"/>
           </a:p>
@@ -1415,7 +1429,7 @@
           <a:p>
             <a:fld id="{86BC45ED-4D28-43F2-B307-A81661FA2ADE}" type="datetimeFigureOut">
               <a:rPr lang="es-MX" smtClean="0"/>
-              <a:t>16/12/2025</a:t>
+              <a:t>29/12/2025</a:t>
             </a:fld>
             <a:endParaRPr lang="es-MX"/>
           </a:p>
@@ -1830,7 +1844,7 @@
           <a:p>
             <a:fld id="{86BC45ED-4D28-43F2-B307-A81661FA2ADE}" type="datetimeFigureOut">
               <a:rPr lang="es-MX" smtClean="0"/>
-              <a:t>16/12/2025</a:t>
+              <a:t>29/12/2025</a:t>
             </a:fld>
             <a:endParaRPr lang="es-MX"/>
           </a:p>
@@ -1972,7 +1986,7 @@
           <a:p>
             <a:fld id="{86BC45ED-4D28-43F2-B307-A81661FA2ADE}" type="datetimeFigureOut">
               <a:rPr lang="es-MX" smtClean="0"/>
-              <a:t>16/12/2025</a:t>
+              <a:t>29/12/2025</a:t>
             </a:fld>
             <a:endParaRPr lang="es-MX"/>
           </a:p>
@@ -2085,7 +2099,7 @@
           <a:p>
             <a:fld id="{86BC45ED-4D28-43F2-B307-A81661FA2ADE}" type="datetimeFigureOut">
               <a:rPr lang="es-MX" smtClean="0"/>
-              <a:t>16/12/2025</a:t>
+              <a:t>29/12/2025</a:t>
             </a:fld>
             <a:endParaRPr lang="es-MX"/>
           </a:p>
@@ -2398,7 +2412,7 @@
           <a:p>
             <a:fld id="{86BC45ED-4D28-43F2-B307-A81661FA2ADE}" type="datetimeFigureOut">
               <a:rPr lang="es-MX" smtClean="0"/>
-              <a:t>16/12/2025</a:t>
+              <a:t>29/12/2025</a:t>
             </a:fld>
             <a:endParaRPr lang="es-MX"/>
           </a:p>
@@ -2687,7 +2701,7 @@
           <a:p>
             <a:fld id="{86BC45ED-4D28-43F2-B307-A81661FA2ADE}" type="datetimeFigureOut">
               <a:rPr lang="es-MX" smtClean="0"/>
-              <a:t>16/12/2025</a:t>
+              <a:t>29/12/2025</a:t>
             </a:fld>
             <a:endParaRPr lang="es-MX"/>
           </a:p>
@@ -2930,7 +2944,7 @@
           <a:p>
             <a:fld id="{86BC45ED-4D28-43F2-B307-A81661FA2ADE}" type="datetimeFigureOut">
               <a:rPr lang="es-MX" smtClean="0"/>
-              <a:t>16/12/2025</a:t>
+              <a:t>29/12/2025</a:t>
             </a:fld>
             <a:endParaRPr lang="es-MX"/>
           </a:p>
@@ -4348,6 +4362,186 @@
     <p:extLst>
       <p:ext uri="{BB962C8B-B14F-4D97-AF65-F5344CB8AC3E}">
         <p14:creationId xmlns:p14="http://schemas.microsoft.com/office/powerpoint/2010/main" val="3032275274"/>
+      </p:ext>
+    </p:extLst>
+  </p:cSld>
+  <p:clrMapOvr>
+    <a:masterClrMapping/>
+  </p:clrMapOvr>
+</p:sld>
+</file>
+
+<file path=ppt/slides/slide10.xml><?xml version="1.0" encoding="utf-8"?>
+<p:sld xmlns:a="http://schemas.openxmlformats.org/drawingml/2006/main" xmlns:r="http://schemas.openxmlformats.org/officeDocument/2006/relationships" xmlns:p="http://schemas.openxmlformats.org/presentationml/2006/main">
+  <p:cSld>
+    <p:spTree>
+      <p:nvGrpSpPr>
+        <p:cNvPr id="1" name=""/>
+        <p:cNvGrpSpPr/>
+        <p:nvPr/>
+      </p:nvGrpSpPr>
+      <p:grpSpPr>
+        <a:xfrm>
+          <a:off x="0" y="0"/>
+          <a:ext cx="0" cy="0"/>
+          <a:chOff x="0" y="0"/>
+          <a:chExt cx="0" cy="0"/>
+        </a:xfrm>
+      </p:grpSpPr>
+    </p:spTree>
+    <p:extLst>
+      <p:ext uri="{BB962C8B-B14F-4D97-AF65-F5344CB8AC3E}">
+        <p14:creationId xmlns:p14="http://schemas.microsoft.com/office/powerpoint/2010/main" val="353227062"/>
+      </p:ext>
+    </p:extLst>
+  </p:cSld>
+  <p:clrMapOvr>
+    <a:masterClrMapping/>
+  </p:clrMapOvr>
+</p:sld>
+</file>
+
+<file path=ppt/slides/slide11.xml><?xml version="1.0" encoding="utf-8"?>
+<p:sld xmlns:a="http://schemas.openxmlformats.org/drawingml/2006/main" xmlns:r="http://schemas.openxmlformats.org/officeDocument/2006/relationships" xmlns:p="http://schemas.openxmlformats.org/presentationml/2006/main">
+  <p:cSld>
+    <p:spTree>
+      <p:nvGrpSpPr>
+        <p:cNvPr id="1" name=""/>
+        <p:cNvGrpSpPr/>
+        <p:nvPr/>
+      </p:nvGrpSpPr>
+      <p:grpSpPr>
+        <a:xfrm>
+          <a:off x="0" y="0"/>
+          <a:ext cx="0" cy="0"/>
+          <a:chOff x="0" y="0"/>
+          <a:chExt cx="0" cy="0"/>
+        </a:xfrm>
+      </p:grpSpPr>
+    </p:spTree>
+    <p:extLst>
+      <p:ext uri="{BB962C8B-B14F-4D97-AF65-F5344CB8AC3E}">
+        <p14:creationId xmlns:p14="http://schemas.microsoft.com/office/powerpoint/2010/main" val="2742400164"/>
+      </p:ext>
+    </p:extLst>
+  </p:cSld>
+  <p:clrMapOvr>
+    <a:masterClrMapping/>
+  </p:clrMapOvr>
+</p:sld>
+</file>
+
+<file path=ppt/slides/slide12.xml><?xml version="1.0" encoding="utf-8"?>
+<p:sld xmlns:a="http://schemas.openxmlformats.org/drawingml/2006/main" xmlns:r="http://schemas.openxmlformats.org/officeDocument/2006/relationships" xmlns:p="http://schemas.openxmlformats.org/presentationml/2006/main">
+  <p:cSld>
+    <p:spTree>
+      <p:nvGrpSpPr>
+        <p:cNvPr id="1" name=""/>
+        <p:cNvGrpSpPr/>
+        <p:nvPr/>
+      </p:nvGrpSpPr>
+      <p:grpSpPr>
+        <a:xfrm>
+          <a:off x="0" y="0"/>
+          <a:ext cx="0" cy="0"/>
+          <a:chOff x="0" y="0"/>
+          <a:chExt cx="0" cy="0"/>
+        </a:xfrm>
+      </p:grpSpPr>
+    </p:spTree>
+    <p:extLst>
+      <p:ext uri="{BB962C8B-B14F-4D97-AF65-F5344CB8AC3E}">
+        <p14:creationId xmlns:p14="http://schemas.microsoft.com/office/powerpoint/2010/main" val="3356086251"/>
+      </p:ext>
+    </p:extLst>
+  </p:cSld>
+  <p:clrMapOvr>
+    <a:masterClrMapping/>
+  </p:clrMapOvr>
+</p:sld>
+</file>
+
+<file path=ppt/slides/slide13.xml><?xml version="1.0" encoding="utf-8"?>
+<p:sld xmlns:a="http://schemas.openxmlformats.org/drawingml/2006/main" xmlns:r="http://schemas.openxmlformats.org/officeDocument/2006/relationships" xmlns:p="http://schemas.openxmlformats.org/presentationml/2006/main">
+  <p:cSld>
+    <p:spTree>
+      <p:nvGrpSpPr>
+        <p:cNvPr id="1" name=""/>
+        <p:cNvGrpSpPr/>
+        <p:nvPr/>
+      </p:nvGrpSpPr>
+      <p:grpSpPr>
+        <a:xfrm>
+          <a:off x="0" y="0"/>
+          <a:ext cx="0" cy="0"/>
+          <a:chOff x="0" y="0"/>
+          <a:chExt cx="0" cy="0"/>
+        </a:xfrm>
+      </p:grpSpPr>
+    </p:spTree>
+    <p:extLst>
+      <p:ext uri="{BB962C8B-B14F-4D97-AF65-F5344CB8AC3E}">
+        <p14:creationId xmlns:p14="http://schemas.microsoft.com/office/powerpoint/2010/main" val="1167889673"/>
+      </p:ext>
+    </p:extLst>
+  </p:cSld>
+  <p:clrMapOvr>
+    <a:masterClrMapping/>
+  </p:clrMapOvr>
+</p:sld>
+</file>
+
+<file path=ppt/slides/slide14.xml><?xml version="1.0" encoding="utf-8"?>
+<p:sld xmlns:a="http://schemas.openxmlformats.org/drawingml/2006/main" xmlns:r="http://schemas.openxmlformats.org/officeDocument/2006/relationships" xmlns:p="http://schemas.openxmlformats.org/presentationml/2006/main">
+  <p:cSld>
+    <p:spTree>
+      <p:nvGrpSpPr>
+        <p:cNvPr id="1" name=""/>
+        <p:cNvGrpSpPr/>
+        <p:nvPr/>
+      </p:nvGrpSpPr>
+      <p:grpSpPr>
+        <a:xfrm>
+          <a:off x="0" y="0"/>
+          <a:ext cx="0" cy="0"/>
+          <a:chOff x="0" y="0"/>
+          <a:chExt cx="0" cy="0"/>
+        </a:xfrm>
+      </p:grpSpPr>
+    </p:spTree>
+    <p:extLst>
+      <p:ext uri="{BB962C8B-B14F-4D97-AF65-F5344CB8AC3E}">
+        <p14:creationId xmlns:p14="http://schemas.microsoft.com/office/powerpoint/2010/main" val="63073005"/>
+      </p:ext>
+    </p:extLst>
+  </p:cSld>
+  <p:clrMapOvr>
+    <a:masterClrMapping/>
+  </p:clrMapOvr>
+</p:sld>
+</file>
+
+<file path=ppt/slides/slide15.xml><?xml version="1.0" encoding="utf-8"?>
+<p:sld xmlns:a="http://schemas.openxmlformats.org/drawingml/2006/main" xmlns:r="http://schemas.openxmlformats.org/officeDocument/2006/relationships" xmlns:p="http://schemas.openxmlformats.org/presentationml/2006/main">
+  <p:cSld>
+    <p:spTree>
+      <p:nvGrpSpPr>
+        <p:cNvPr id="1" name=""/>
+        <p:cNvGrpSpPr/>
+        <p:nvPr/>
+      </p:nvGrpSpPr>
+      <p:grpSpPr>
+        <a:xfrm>
+          <a:off x="0" y="0"/>
+          <a:ext cx="0" cy="0"/>
+          <a:chOff x="0" y="0"/>
+          <a:chExt cx="0" cy="0"/>
+        </a:xfrm>
+      </p:grpSpPr>
+    </p:spTree>
+    <p:extLst>
+      <p:ext uri="{BB962C8B-B14F-4D97-AF65-F5344CB8AC3E}">
+        <p14:creationId xmlns:p14="http://schemas.microsoft.com/office/powerpoint/2010/main" val="4260270686"/>
       </p:ext>
     </p:extLst>
   </p:cSld>
@@ -7288,6 +7482,66 @@
           <a:chExt cx="0" cy="0"/>
         </a:xfrm>
       </p:grpSpPr>
+      <p:pic>
+        <p:nvPicPr>
+          <p:cNvPr id="7" name="Imagen 6">
+            <a:extLst>
+              <a:ext uri="{FF2B5EF4-FFF2-40B4-BE49-F238E27FC236}">
+                <a16:creationId xmlns:a16="http://schemas.microsoft.com/office/drawing/2014/main" id="{79E965E9-54E0-C245-9AD1-EF55CAF66650}"/>
+              </a:ext>
+            </a:extLst>
+          </p:cNvPr>
+          <p:cNvPicPr>
+            <a:picLocks noChangeAspect="1"/>
+          </p:cNvPicPr>
+          <p:nvPr/>
+        </p:nvPicPr>
+        <p:blipFill>
+          <a:blip r:embed="rId2"/>
+          <a:stretch>
+            <a:fillRect/>
+          </a:stretch>
+        </p:blipFill>
+        <p:spPr>
+          <a:xfrm>
+            <a:off x="1557337" y="2914650"/>
+            <a:ext cx="9077325" cy="1028700"/>
+          </a:xfrm>
+          <a:prstGeom prst="rect">
+            <a:avLst/>
+          </a:prstGeom>
+        </p:spPr>
+      </p:pic>
+      <p:pic>
+        <p:nvPicPr>
+          <p:cNvPr id="9" name="Imagen 8">
+            <a:extLst>
+              <a:ext uri="{FF2B5EF4-FFF2-40B4-BE49-F238E27FC236}">
+                <a16:creationId xmlns:a16="http://schemas.microsoft.com/office/drawing/2014/main" id="{A86BF661-39B8-CFED-EFA2-79A756590145}"/>
+              </a:ext>
+            </a:extLst>
+          </p:cNvPr>
+          <p:cNvPicPr>
+            <a:picLocks noChangeAspect="1"/>
+          </p:cNvPicPr>
+          <p:nvPr/>
+        </p:nvPicPr>
+        <p:blipFill>
+          <a:blip r:embed="rId3"/>
+          <a:stretch>
+            <a:fillRect/>
+          </a:stretch>
+        </p:blipFill>
+        <p:spPr>
+          <a:xfrm>
+            <a:off x="1462087" y="4378978"/>
+            <a:ext cx="9172575" cy="923925"/>
+          </a:xfrm>
+          <a:prstGeom prst="rect">
+            <a:avLst/>
+          </a:prstGeom>
+        </p:spPr>
+      </p:pic>
     </p:spTree>
     <p:extLst>
       <p:ext uri="{BB962C8B-B14F-4D97-AF65-F5344CB8AC3E}">
@@ -7318,6 +7572,36 @@
           <a:chExt cx="0" cy="0"/>
         </a:xfrm>
       </p:grpSpPr>
+      <p:pic>
+        <p:nvPicPr>
+          <p:cNvPr id="3" name="Imagen 2">
+            <a:extLst>
+              <a:ext uri="{FF2B5EF4-FFF2-40B4-BE49-F238E27FC236}">
+                <a16:creationId xmlns:a16="http://schemas.microsoft.com/office/drawing/2014/main" id="{575B4374-8EB1-92E4-C6C6-7156DDE7B920}"/>
+              </a:ext>
+            </a:extLst>
+          </p:cNvPr>
+          <p:cNvPicPr>
+            <a:picLocks noChangeAspect="1"/>
+          </p:cNvPicPr>
+          <p:nvPr/>
+        </p:nvPicPr>
+        <p:blipFill>
+          <a:blip r:embed="rId2"/>
+          <a:stretch>
+            <a:fillRect/>
+          </a:stretch>
+        </p:blipFill>
+        <p:spPr>
+          <a:xfrm>
+            <a:off x="3395662" y="1362075"/>
+            <a:ext cx="5400675" cy="4133850"/>
+          </a:xfrm>
+          <a:prstGeom prst="rect">
+            <a:avLst/>
+          </a:prstGeom>
+        </p:spPr>
+      </p:pic>
     </p:spTree>
     <p:extLst>
       <p:ext uri="{BB962C8B-B14F-4D97-AF65-F5344CB8AC3E}">
@@ -7348,10 +7632,130 @@
           <a:chExt cx="0" cy="0"/>
         </a:xfrm>
       </p:grpSpPr>
+      <p:pic>
+        <p:nvPicPr>
+          <p:cNvPr id="5" name="Imagen 4">
+            <a:extLst>
+              <a:ext uri="{FF2B5EF4-FFF2-40B4-BE49-F238E27FC236}">
+                <a16:creationId xmlns:a16="http://schemas.microsoft.com/office/drawing/2014/main" id="{EE1353B3-3373-B651-FB39-47D4D7404DFB}"/>
+              </a:ext>
+            </a:extLst>
+          </p:cNvPr>
+          <p:cNvPicPr>
+            <a:picLocks noChangeAspect="1"/>
+          </p:cNvPicPr>
+          <p:nvPr/>
+        </p:nvPicPr>
+        <p:blipFill>
+          <a:blip r:embed="rId2"/>
+          <a:stretch>
+            <a:fillRect/>
+          </a:stretch>
+        </p:blipFill>
+        <p:spPr>
+          <a:xfrm>
+            <a:off x="1578628" y="599515"/>
+            <a:ext cx="5457825" cy="4152900"/>
+          </a:xfrm>
+          <a:prstGeom prst="rect">
+            <a:avLst/>
+          </a:prstGeom>
+        </p:spPr>
+      </p:pic>
     </p:spTree>
     <p:extLst>
       <p:ext uri="{BB962C8B-B14F-4D97-AF65-F5344CB8AC3E}">
         <p14:creationId xmlns:p14="http://schemas.microsoft.com/office/powerpoint/2010/main" val="702721962"/>
+      </p:ext>
+    </p:extLst>
+  </p:cSld>
+  <p:clrMapOvr>
+    <a:masterClrMapping/>
+  </p:clrMapOvr>
+</p:sld>
+</file>
+
+<file path=ppt/slides/slide7.xml><?xml version="1.0" encoding="utf-8"?>
+<p:sld xmlns:a="http://schemas.openxmlformats.org/drawingml/2006/main" xmlns:r="http://schemas.openxmlformats.org/officeDocument/2006/relationships" xmlns:p="http://schemas.openxmlformats.org/presentationml/2006/main">
+  <p:cSld>
+    <p:spTree>
+      <p:nvGrpSpPr>
+        <p:cNvPr id="1" name=""/>
+        <p:cNvGrpSpPr/>
+        <p:nvPr/>
+      </p:nvGrpSpPr>
+      <p:grpSpPr>
+        <a:xfrm>
+          <a:off x="0" y="0"/>
+          <a:ext cx="0" cy="0"/>
+          <a:chOff x="0" y="0"/>
+          <a:chExt cx="0" cy="0"/>
+        </a:xfrm>
+      </p:grpSpPr>
+    </p:spTree>
+    <p:extLst>
+      <p:ext uri="{BB962C8B-B14F-4D97-AF65-F5344CB8AC3E}">
+        <p14:creationId xmlns:p14="http://schemas.microsoft.com/office/powerpoint/2010/main" val="862030952"/>
+      </p:ext>
+    </p:extLst>
+  </p:cSld>
+  <p:clrMapOvr>
+    <a:masterClrMapping/>
+  </p:clrMapOvr>
+</p:sld>
+</file>
+
+<file path=ppt/slides/slide8.xml><?xml version="1.0" encoding="utf-8"?>
+<p:sld xmlns:a="http://schemas.openxmlformats.org/drawingml/2006/main" xmlns:r="http://schemas.openxmlformats.org/officeDocument/2006/relationships" xmlns:p="http://schemas.openxmlformats.org/presentationml/2006/main">
+  <p:cSld>
+    <p:spTree>
+      <p:nvGrpSpPr>
+        <p:cNvPr id="1" name=""/>
+        <p:cNvGrpSpPr/>
+        <p:nvPr/>
+      </p:nvGrpSpPr>
+      <p:grpSpPr>
+        <a:xfrm>
+          <a:off x="0" y="0"/>
+          <a:ext cx="0" cy="0"/>
+          <a:chOff x="0" y="0"/>
+          <a:chExt cx="0" cy="0"/>
+        </a:xfrm>
+      </p:grpSpPr>
+    </p:spTree>
+    <p:extLst>
+      <p:ext uri="{BB962C8B-B14F-4D97-AF65-F5344CB8AC3E}">
+        <p14:creationId xmlns:p14="http://schemas.microsoft.com/office/powerpoint/2010/main" val="632329789"/>
+      </p:ext>
+    </p:extLst>
+  </p:cSld>
+  <p:clrMapOvr>
+    <a:masterClrMapping/>
+  </p:clrMapOvr>
+</p:sld>
+</file>
+
+<file path=ppt/slides/slide9.xml><?xml version="1.0" encoding="utf-8"?>
+<p:sld xmlns:a="http://schemas.openxmlformats.org/drawingml/2006/main" xmlns:r="http://schemas.openxmlformats.org/officeDocument/2006/relationships" xmlns:p="http://schemas.openxmlformats.org/presentationml/2006/main">
+  <p:cSld>
+    <p:spTree>
+      <p:nvGrpSpPr>
+        <p:cNvPr id="1" name=""/>
+        <p:cNvGrpSpPr/>
+        <p:nvPr/>
+      </p:nvGrpSpPr>
+      <p:grpSpPr>
+        <a:xfrm>
+          <a:off x="0" y="0"/>
+          <a:ext cx="0" cy="0"/>
+          <a:chOff x="0" y="0"/>
+          <a:chExt cx="0" cy="0"/>
+        </a:xfrm>
+      </p:grpSpPr>
+    </p:spTree>
+    <p:extLst>
+      <p:ext uri="{BB962C8B-B14F-4D97-AF65-F5344CB8AC3E}">
+        <p14:creationId xmlns:p14="http://schemas.microsoft.com/office/powerpoint/2010/main" val="437186732"/>
       </p:ext>
     </p:extLst>
   </p:cSld>
